--- a/files/CS449/Petrucci/CS_0449_Recitation_1.pptx
+++ b/files/CS449/Petrucci/CS_0449_Recitation_1.pptx
@@ -125,6 +125,11 @@
       </a:defRPr>
     </a:lvl9pPr>
   </p:defaultTextStyle>
+  <p:extLst>
+    <p:ext uri="{EFAFB233-063F-42B5-8137-9DF3F51BA10A}">
+      <p15:sldGuideLst xmlns:p15="http://schemas.microsoft.com/office/powerpoint/2012/main"/>
+    </p:ext>
+  </p:extLst>
 </p:presentation>
 </file>
 
@@ -236,7 +241,7 @@
           <a:p>
             <a:fld id="{0921498D-1924-4F97-9E8E-EACAC4F3772F}" type="datetimeFigureOut">
               <a:rPr lang="en-US" smtClean="0"/>
-              <a:t>8/26/2020</a:t>
+              <a:t>8/28/2020</a:t>
             </a:fld>
             <a:endParaRPr lang="en-US"/>
           </a:p>
@@ -787,7 +792,7 @@
           <a:p>
             <a:fld id="{5F8BB1F7-F8EF-48CB-9BE4-5D58AB8BE73D}" type="datetimeFigureOut">
               <a:rPr lang="en-US" smtClean="0"/>
-              <a:t>8/26/2020</a:t>
+              <a:t>8/28/2020</a:t>
             </a:fld>
             <a:endParaRPr lang="en-US"/>
           </a:p>
@@ -957,7 +962,7 @@
           <a:p>
             <a:fld id="{5F8BB1F7-F8EF-48CB-9BE4-5D58AB8BE73D}" type="datetimeFigureOut">
               <a:rPr lang="en-US" smtClean="0"/>
-              <a:t>8/26/2020</a:t>
+              <a:t>8/28/2020</a:t>
             </a:fld>
             <a:endParaRPr lang="en-US"/>
           </a:p>
@@ -1137,7 +1142,7 @@
           <a:p>
             <a:fld id="{5F8BB1F7-F8EF-48CB-9BE4-5D58AB8BE73D}" type="datetimeFigureOut">
               <a:rPr lang="en-US" smtClean="0"/>
-              <a:t>8/26/2020</a:t>
+              <a:t>8/28/2020</a:t>
             </a:fld>
             <a:endParaRPr lang="en-US"/>
           </a:p>
@@ -1307,7 +1312,7 @@
           <a:p>
             <a:fld id="{5F8BB1F7-F8EF-48CB-9BE4-5D58AB8BE73D}" type="datetimeFigureOut">
               <a:rPr lang="en-US" smtClean="0"/>
-              <a:t>8/26/2020</a:t>
+              <a:t>8/28/2020</a:t>
             </a:fld>
             <a:endParaRPr lang="en-US"/>
           </a:p>
@@ -1575,7 +1580,7 @@
           <a:p>
             <a:fld id="{5F8BB1F7-F8EF-48CB-9BE4-5D58AB8BE73D}" type="datetimeFigureOut">
               <a:rPr lang="en-US" smtClean="0"/>
-              <a:t>8/26/2020</a:t>
+              <a:t>8/28/2020</a:t>
             </a:fld>
             <a:endParaRPr lang="en-US"/>
           </a:p>
@@ -1807,7 +1812,7 @@
           <a:p>
             <a:fld id="{5F8BB1F7-F8EF-48CB-9BE4-5D58AB8BE73D}" type="datetimeFigureOut">
               <a:rPr lang="en-US" smtClean="0"/>
-              <a:t>8/26/2020</a:t>
+              <a:t>8/28/2020</a:t>
             </a:fld>
             <a:endParaRPr lang="en-US"/>
           </a:p>
@@ -2166,7 +2171,7 @@
           <a:p>
             <a:fld id="{5F8BB1F7-F8EF-48CB-9BE4-5D58AB8BE73D}" type="datetimeFigureOut">
               <a:rPr lang="en-US" smtClean="0"/>
-              <a:t>8/26/2020</a:t>
+              <a:t>8/28/2020</a:t>
             </a:fld>
             <a:endParaRPr lang="en-US"/>
           </a:p>
@@ -2307,7 +2312,7 @@
           <a:p>
             <a:fld id="{5F8BB1F7-F8EF-48CB-9BE4-5D58AB8BE73D}" type="datetimeFigureOut">
               <a:rPr lang="en-US" smtClean="0"/>
-              <a:t>8/26/2020</a:t>
+              <a:t>8/28/2020</a:t>
             </a:fld>
             <a:endParaRPr lang="en-US"/>
           </a:p>
@@ -2402,7 +2407,7 @@
           <a:p>
             <a:fld id="{5F8BB1F7-F8EF-48CB-9BE4-5D58AB8BE73D}" type="datetimeFigureOut">
               <a:rPr lang="en-US" smtClean="0"/>
-              <a:t>8/26/2020</a:t>
+              <a:t>8/28/2020</a:t>
             </a:fld>
             <a:endParaRPr lang="en-US"/>
           </a:p>
@@ -2759,7 +2764,7 @@
           <a:p>
             <a:fld id="{5F8BB1F7-F8EF-48CB-9BE4-5D58AB8BE73D}" type="datetimeFigureOut">
               <a:rPr lang="en-US" smtClean="0"/>
-              <a:t>8/26/2020</a:t>
+              <a:t>8/28/2020</a:t>
             </a:fld>
             <a:endParaRPr lang="en-US"/>
           </a:p>
@@ -3116,7 +3121,7 @@
           <a:p>
             <a:fld id="{5F8BB1F7-F8EF-48CB-9BE4-5D58AB8BE73D}" type="datetimeFigureOut">
               <a:rPr lang="en-US" smtClean="0"/>
-              <a:t>8/26/2020</a:t>
+              <a:t>8/28/2020</a:t>
             </a:fld>
             <a:endParaRPr lang="en-US"/>
           </a:p>
@@ -3358,7 +3363,7 @@
           <a:p>
             <a:fld id="{5F8BB1F7-F8EF-48CB-9BE4-5D58AB8BE73D}" type="datetimeFigureOut">
               <a:rPr lang="en-US" smtClean="0"/>
-              <a:t>8/26/2020</a:t>
+              <a:t>8/28/2020</a:t>
             </a:fld>
             <a:endParaRPr lang="en-US"/>
           </a:p>
@@ -3924,8 +3929,8 @@
           </a:p>
         </p:txBody>
       </p:sp>
-      <mc:AlternateContent xmlns:mc="http://schemas.openxmlformats.org/markup-compatibility/2006">
-        <mc:Choice xmlns:a14="http://schemas.microsoft.com/office/drawing/2010/main" Requires="a14">
+      <mc:AlternateContent xmlns:mc="http://schemas.openxmlformats.org/markup-compatibility/2006" xmlns:a14="http://schemas.microsoft.com/office/drawing/2010/main">
+        <mc:Choice Requires="a14">
           <p:sp>
             <p:nvSpPr>
               <p:cNvPr id="3" name="Content Placeholder 2">
@@ -4051,7 +4056,7 @@
             </p:txBody>
           </p:sp>
         </mc:Choice>
-        <mc:Fallback>
+        <mc:Fallback xmlns="">
           <p:sp>
             <p:nvSpPr>
               <p:cNvPr id="3" name="Content Placeholder 2">
@@ -4149,8 +4154,8 @@
           </a:p>
         </p:txBody>
       </p:sp>
-      <mc:AlternateContent xmlns:mc="http://schemas.openxmlformats.org/markup-compatibility/2006">
-        <mc:Choice xmlns:a14="http://schemas.microsoft.com/office/drawing/2010/main" Requires="a14">
+      <mc:AlternateContent xmlns:mc="http://schemas.openxmlformats.org/markup-compatibility/2006" xmlns:a14="http://schemas.microsoft.com/office/drawing/2010/main">
+        <mc:Choice Requires="a14">
           <p:sp>
             <p:nvSpPr>
               <p:cNvPr id="3" name="Content Placeholder 2">
@@ -4337,7 +4342,7 @@
             </p:txBody>
           </p:sp>
         </mc:Choice>
-        <mc:Fallback>
+        <mc:Fallback xmlns="">
           <p:sp>
             <p:nvSpPr>
               <p:cNvPr id="3" name="Content Placeholder 2">
@@ -4967,8 +4972,8 @@
           </a:p>
         </p:txBody>
       </p:sp>
-      <mc:AlternateContent xmlns:mc="http://schemas.openxmlformats.org/markup-compatibility/2006">
-        <mc:Choice xmlns:a14="http://schemas.microsoft.com/office/drawing/2010/main" Requires="a14">
+      <mc:AlternateContent xmlns:mc="http://schemas.openxmlformats.org/markup-compatibility/2006" xmlns:a14="http://schemas.microsoft.com/office/drawing/2010/main">
+        <mc:Choice Requires="a14">
           <p:sp>
             <p:nvSpPr>
               <p:cNvPr id="3" name="Content Placeholder 2">
@@ -5292,7 +5297,7 @@
             </p:txBody>
           </p:sp>
         </mc:Choice>
-        <mc:Fallback>
+        <mc:Fallback xmlns="">
           <p:sp>
             <p:nvSpPr>
               <p:cNvPr id="3" name="Content Placeholder 2">
@@ -6490,8 +6495,8 @@
           </a:p>
         </p:txBody>
       </p:sp>
-      <mc:AlternateContent xmlns:mc="http://schemas.openxmlformats.org/markup-compatibility/2006">
-        <mc:Choice xmlns:a14="http://schemas.microsoft.com/office/drawing/2010/main" Requires="a14">
+      <mc:AlternateContent xmlns:mc="http://schemas.openxmlformats.org/markup-compatibility/2006" xmlns:a14="http://schemas.microsoft.com/office/drawing/2010/main">
+        <mc:Choice Requires="a14">
           <p:sp>
             <p:nvSpPr>
               <p:cNvPr id="3" name="Content Placeholder 2">
@@ -6662,7 +6667,7 @@
             </p:txBody>
           </p:sp>
         </mc:Choice>
-        <mc:Fallback>
+        <mc:Fallback xmlns="">
           <p:sp>
             <p:nvSpPr>
               <p:cNvPr id="3" name="Content Placeholder 2">
@@ -6994,8 +6999,8 @@
           </a:p>
         </p:txBody>
       </p:sp>
-      <mc:AlternateContent xmlns:mc="http://schemas.openxmlformats.org/markup-compatibility/2006">
-        <mc:Choice xmlns:a14="http://schemas.microsoft.com/office/drawing/2010/main" Requires="a14">
+      <mc:AlternateContent xmlns:mc="http://schemas.openxmlformats.org/markup-compatibility/2006" xmlns:a14="http://schemas.microsoft.com/office/drawing/2010/main">
+        <mc:Choice Requires="a14">
           <p:sp>
             <p:nvSpPr>
               <p:cNvPr id="3" name="Content Placeholder 2">
@@ -7236,7 +7241,7 @@
             </p:txBody>
           </p:sp>
         </mc:Choice>
-        <mc:Fallback>
+        <mc:Fallback xmlns="">
           <p:sp>
             <p:nvSpPr>
               <p:cNvPr id="3" name="Content Placeholder 2">
@@ -7295,7 +7300,7 @@
           <p:nvPr>
             <p:extLst>
               <p:ext uri="{D42A27DB-BD31-4B8C-83A1-F6EECF244321}">
-                <p14:modId xmlns:p14="http://schemas.microsoft.com/office/powerpoint/2010/main" val="190707552"/>
+                <p14:modId xmlns:p14="http://schemas.microsoft.com/office/powerpoint/2010/main" val="2246298767"/>
               </p:ext>
             </p:extLst>
           </p:nvPr>
@@ -7740,7 +7745,133 @@
                             <a:srgbClr val="FF0000"/>
                           </a:solidFill>
                         </a:rPr>
+                        <a:t>1</a:t>
+                      </a:r>
+                    </a:p>
+                  </a:txBody>
+                  <a:tcPr>
+                    <a:solidFill>
+                      <a:srgbClr val="00B0F0"/>
+                    </a:solidFill>
+                  </a:tcPr>
+                </a:tc>
+                <a:tc>
+                  <a:txBody>
+                    <a:bodyPr/>
+                    <a:lstStyle/>
+                    <a:p>
+                      <a:r>
+                        <a:rPr lang="en-US" dirty="0">
+                          <a:solidFill>
+                            <a:srgbClr val="FF0000"/>
+                          </a:solidFill>
+                        </a:rPr>
+                        <a:t>1</a:t>
+                      </a:r>
+                    </a:p>
+                  </a:txBody>
+                  <a:tcPr>
+                    <a:solidFill>
+                      <a:srgbClr val="00B0F0"/>
+                    </a:solidFill>
+                  </a:tcPr>
+                </a:tc>
+                <a:tc>
+                  <a:txBody>
+                    <a:bodyPr/>
+                    <a:lstStyle/>
+                    <a:p>
+                      <a:r>
+                        <a:rPr lang="en-US" dirty="0">
+                          <a:solidFill>
+                            <a:srgbClr val="FF0000"/>
+                          </a:solidFill>
+                        </a:rPr>
+                        <a:t>1</a:t>
+                      </a:r>
+                    </a:p>
+                  </a:txBody>
+                  <a:tcPr>
+                    <a:solidFill>
+                      <a:srgbClr val="00B0F0"/>
+                    </a:solidFill>
+                  </a:tcPr>
+                </a:tc>
+                <a:tc>
+                  <a:txBody>
+                    <a:bodyPr/>
+                    <a:lstStyle/>
+                    <a:p>
+                      <a:r>
+                        <a:rPr lang="en-US" dirty="0">
+                          <a:solidFill>
+                            <a:srgbClr val="FF0000"/>
+                          </a:solidFill>
+                        </a:rPr>
+                        <a:t>1</a:t>
+                      </a:r>
+                    </a:p>
+                  </a:txBody>
+                  <a:tcPr>
+                    <a:solidFill>
+                      <a:srgbClr val="00B0F0"/>
+                    </a:solidFill>
+                  </a:tcPr>
+                </a:tc>
+                <a:tc>
+                  <a:txBody>
+                    <a:bodyPr/>
+                    <a:lstStyle/>
+                    <a:p>
+                      <a:r>
+                        <a:rPr lang="en-US" dirty="0">
+                          <a:solidFill>
+                            <a:srgbClr val="FF0000"/>
+                          </a:solidFill>
+                        </a:rPr>
                         <a:t>0</a:t>
+                      </a:r>
+                    </a:p>
+                  </a:txBody>
+                  <a:tcPr>
+                    <a:solidFill>
+                      <a:srgbClr val="00B0F0"/>
+                    </a:solidFill>
+                  </a:tcPr>
+                </a:tc>
+                <a:tc>
+                  <a:txBody>
+                    <a:bodyPr/>
+                    <a:lstStyle/>
+                    <a:p>
+                      <a:r>
+                        <a:rPr lang="en-US" dirty="0">
+                          <a:solidFill>
+                            <a:srgbClr val="FF0000"/>
+                          </a:solidFill>
+                        </a:rPr>
+                        <a:t>1</a:t>
+                      </a:r>
+                    </a:p>
+                  </a:txBody>
+                  <a:tcPr>
+                    <a:solidFill>
+                      <a:srgbClr val="00B0F0"/>
+                    </a:solidFill>
+                  </a:tcPr>
+                </a:tc>
+                <a:tc>
+                  <a:txBody>
+                    <a:bodyPr/>
+                    <a:lstStyle/>
+                    <a:p>
+                      <a:r>
+                        <a:rPr lang="en-US" dirty="0">
+                          <a:solidFill>
+                            <a:srgbClr val="FF0000"/>
+                          </a:solidFill>
+                        </a:rPr>
+                        <a:t>1</a:t>
                       </a:r>
                     </a:p>
                   </a:txBody>
@@ -8086,132 +8217,6 @@
                     </a:solidFill>
                   </a:tcPr>
                 </a:tc>
-                <a:tc>
-                  <a:txBody>
-                    <a:bodyPr/>
-                    <a:lstStyle/>
-                    <a:p>
-                      <a:r>
-                        <a:rPr lang="en-US" dirty="0">
-                          <a:solidFill>
-                            <a:srgbClr val="FF0000"/>
-                          </a:solidFill>
-                        </a:rPr>
-                        <a:t>1</a:t>
-                      </a:r>
-                    </a:p>
-                  </a:txBody>
-                  <a:tcPr>
-                    <a:solidFill>
-                      <a:srgbClr val="00B0F0"/>
-                    </a:solidFill>
-                  </a:tcPr>
-                </a:tc>
-                <a:tc>
-                  <a:txBody>
-                    <a:bodyPr/>
-                    <a:lstStyle/>
-                    <a:p>
-                      <a:r>
-                        <a:rPr lang="en-US" dirty="0">
-                          <a:solidFill>
-                            <a:srgbClr val="FF0000"/>
-                          </a:solidFill>
-                        </a:rPr>
-                        <a:t>1</a:t>
-                      </a:r>
-                    </a:p>
-                  </a:txBody>
-                  <a:tcPr>
-                    <a:solidFill>
-                      <a:srgbClr val="00B0F0"/>
-                    </a:solidFill>
-                  </a:tcPr>
-                </a:tc>
-                <a:tc>
-                  <a:txBody>
-                    <a:bodyPr/>
-                    <a:lstStyle/>
-                    <a:p>
-                      <a:r>
-                        <a:rPr lang="en-US" dirty="0">
-                          <a:solidFill>
-                            <a:srgbClr val="FF0000"/>
-                          </a:solidFill>
-                        </a:rPr>
-                        <a:t>1</a:t>
-                      </a:r>
-                    </a:p>
-                  </a:txBody>
-                  <a:tcPr>
-                    <a:solidFill>
-                      <a:srgbClr val="00B0F0"/>
-                    </a:solidFill>
-                  </a:tcPr>
-                </a:tc>
-                <a:tc>
-                  <a:txBody>
-                    <a:bodyPr/>
-                    <a:lstStyle/>
-                    <a:p>
-                      <a:r>
-                        <a:rPr lang="en-US" dirty="0">
-                          <a:solidFill>
-                            <a:srgbClr val="FF0000"/>
-                          </a:solidFill>
-                        </a:rPr>
-                        <a:t>1</a:t>
-                      </a:r>
-                    </a:p>
-                  </a:txBody>
-                  <a:tcPr>
-                    <a:solidFill>
-                      <a:srgbClr val="00B0F0"/>
-                    </a:solidFill>
-                  </a:tcPr>
-                </a:tc>
-                <a:tc>
-                  <a:txBody>
-                    <a:bodyPr/>
-                    <a:lstStyle/>
-                    <a:p>
-                      <a:r>
-                        <a:rPr lang="en-US" dirty="0">
-                          <a:solidFill>
-                            <a:srgbClr val="FF0000"/>
-                          </a:solidFill>
-                        </a:rPr>
-                        <a:t>0</a:t>
-                      </a:r>
-                    </a:p>
-                  </a:txBody>
-                  <a:tcPr>
-                    <a:solidFill>
-                      <a:srgbClr val="00B0F0"/>
-                    </a:solidFill>
-                  </a:tcPr>
-                </a:tc>
-                <a:tc>
-                  <a:txBody>
-                    <a:bodyPr/>
-                    <a:lstStyle/>
-                    <a:p>
-                      <a:r>
-                        <a:rPr lang="en-US" dirty="0">
-                          <a:solidFill>
-                            <a:srgbClr val="FF0000"/>
-                          </a:solidFill>
-                        </a:rPr>
-                        <a:t>1</a:t>
-                      </a:r>
-                    </a:p>
-                  </a:txBody>
-                  <a:tcPr>
-                    <a:solidFill>
-                      <a:srgbClr val="00B0F0"/>
-                    </a:solidFill>
-                  </a:tcPr>
-                </a:tc>
                 <a:extLst>
                   <a:ext uri="{0D108BD9-81ED-4DB2-BD59-A6C34878D82A}">
                     <a16:rowId xmlns:a16="http://schemas.microsoft.com/office/drawing/2014/main" val="685416735"/>
@@ -8442,8 +8447,8 @@
           </a:fontRef>
         </p:style>
       </p:cxnSp>
-      <mc:AlternateContent xmlns:mc="http://schemas.openxmlformats.org/markup-compatibility/2006">
-        <mc:Choice xmlns:a14="http://schemas.microsoft.com/office/drawing/2010/main" Requires="a14">
+      <mc:AlternateContent xmlns:mc="http://schemas.openxmlformats.org/markup-compatibility/2006" xmlns:a14="http://schemas.microsoft.com/office/drawing/2010/main">
+        <mc:Choice Requires="a14">
           <p:sp>
             <p:nvSpPr>
               <p:cNvPr id="19" name="TextBox 18">
@@ -8512,7 +8517,7 @@
             </p:txBody>
           </p:sp>
         </mc:Choice>
-        <mc:Fallback>
+        <mc:Fallback xmlns="">
           <p:sp>
             <p:nvSpPr>
               <p:cNvPr id="19" name="TextBox 18">
@@ -8571,7 +8576,7 @@
         </p:nvSpPr>
         <p:spPr>
           <a:xfrm rot="5400000">
-            <a:off x="6487484" y="4480652"/>
+            <a:off x="8517245" y="4439726"/>
             <a:ext cx="710035" cy="3675331"/>
           </a:xfrm>
           <a:prstGeom prst="rightBrace">
@@ -8620,8 +8625,8 @@
         </p:nvSpPr>
         <p:spPr>
           <a:xfrm>
-            <a:off x="6938544" y="6414117"/>
-            <a:ext cx="1554272" cy="369332"/>
+            <a:off x="7958906" y="6564722"/>
+            <a:ext cx="1682512" cy="369332"/>
           </a:xfrm>
           <a:prstGeom prst="rect">
             <a:avLst/>
@@ -8640,7 +8645,7 @@
                   <a:srgbClr val="FF0000"/>
                 </a:solidFill>
               </a:rPr>
-              <a:t>Leading Zeros</a:t>
+              <a:t>Trailing Zeros</a:t>
             </a:r>
           </a:p>
         </p:txBody>
@@ -9687,8 +9692,8 @@
           </a:p>
         </p:txBody>
       </p:sp>
-      <mc:AlternateContent xmlns:mc="http://schemas.openxmlformats.org/markup-compatibility/2006">
-        <mc:Choice xmlns:a14="http://schemas.microsoft.com/office/drawing/2010/main" Requires="a14">
+      <mc:AlternateContent xmlns:mc="http://schemas.openxmlformats.org/markup-compatibility/2006" xmlns:a14="http://schemas.microsoft.com/office/drawing/2010/main">
+        <mc:Choice Requires="a14">
           <p:sp>
             <p:nvSpPr>
               <p:cNvPr id="3" name="Content Placeholder 2">
@@ -9926,7 +9931,7 @@
             </p:txBody>
           </p:sp>
         </mc:Choice>
-        <mc:Fallback>
+        <mc:Fallback xmlns="">
           <p:sp>
             <p:nvSpPr>
               <p:cNvPr id="3" name="Content Placeholder 2">
@@ -13092,8 +13097,8 @@
           </a:p>
         </p:txBody>
       </p:sp>
-      <mc:AlternateContent xmlns:mc="http://schemas.openxmlformats.org/markup-compatibility/2006">
-        <mc:Choice xmlns:a14="http://schemas.microsoft.com/office/drawing/2010/main" Requires="a14">
+      <mc:AlternateContent xmlns:mc="http://schemas.openxmlformats.org/markup-compatibility/2006" xmlns:a14="http://schemas.microsoft.com/office/drawing/2010/main">
+        <mc:Choice Requires="a14">
           <p:sp>
             <p:nvSpPr>
               <p:cNvPr id="3" name="Content Placeholder 2">
@@ -13278,7 +13283,7 @@
             </p:txBody>
           </p:sp>
         </mc:Choice>
-        <mc:Fallback>
+        <mc:Fallback xmlns="">
           <p:sp>
             <p:nvSpPr>
               <p:cNvPr id="3" name="Content Placeholder 2">
@@ -13850,8 +13855,8 @@
           </a:p>
         </p:txBody>
       </p:sp>
-      <mc:AlternateContent xmlns:mc="http://schemas.openxmlformats.org/markup-compatibility/2006">
-        <mc:Choice xmlns:a14="http://schemas.microsoft.com/office/drawing/2010/main" Requires="a14">
+      <mc:AlternateContent xmlns:mc="http://schemas.openxmlformats.org/markup-compatibility/2006" xmlns:a14="http://schemas.microsoft.com/office/drawing/2010/main">
+        <mc:Choice Requires="a14">
           <p:sp>
             <p:nvSpPr>
               <p:cNvPr id="3" name="Content Placeholder 2">
@@ -13971,7 +13976,7 @@
             </p:txBody>
           </p:sp>
         </mc:Choice>
-        <mc:Fallback>
+        <mc:Fallback xmlns="">
           <p:sp>
             <p:nvSpPr>
               <p:cNvPr id="3" name="Content Placeholder 2">
@@ -14396,8 +14401,8 @@
           </a:p>
         </p:txBody>
       </p:sp>
-      <mc:AlternateContent xmlns:mc="http://schemas.openxmlformats.org/markup-compatibility/2006">
-        <mc:Choice xmlns:a14="http://schemas.microsoft.com/office/drawing/2010/main" Requires="a14">
+      <mc:AlternateContent xmlns:mc="http://schemas.openxmlformats.org/markup-compatibility/2006" xmlns:a14="http://schemas.microsoft.com/office/drawing/2010/main">
+        <mc:Choice Requires="a14">
           <p:sp>
             <p:nvSpPr>
               <p:cNvPr id="3" name="Content Placeholder 2">
@@ -14542,7 +14547,7 @@
             </p:txBody>
           </p:sp>
         </mc:Choice>
-        <mc:Fallback>
+        <mc:Fallback xmlns="">
           <p:sp>
             <p:nvSpPr>
               <p:cNvPr id="3" name="Content Placeholder 2">

--- a/files/CS449/Petrucci/CS_0449_Recitation_1.pptx
+++ b/files/CS449/Petrucci/CS_0449_Recitation_1.pptx
@@ -7300,7 +7300,7 @@
           <p:nvPr>
             <p:extLst>
               <p:ext uri="{D42A27DB-BD31-4B8C-83A1-F6EECF244321}">
-                <p14:modId xmlns:p14="http://schemas.microsoft.com/office/powerpoint/2010/main" val="2246298767"/>
+                <p14:modId xmlns:p14="http://schemas.microsoft.com/office/powerpoint/2010/main" val="457503911"/>
               </p:ext>
             </p:extLst>
           </p:nvPr>
@@ -7421,14 +7421,14 @@
                     </a:ext>
                   </a:extLst>
                 </a:gridCol>
-                <a:gridCol w="208280">
+                <a:gridCol w="261480">
                   <a:extLst>
                     <a:ext uri="{9D8B030D-6E8A-4147-A177-3AD203B41FA5}">
                       <a16:colId xmlns:a16="http://schemas.microsoft.com/office/drawing/2014/main" val="3672851766"/>
                     </a:ext>
                   </a:extLst>
                 </a:gridCol>
-                <a:gridCol w="299720">
+                <a:gridCol w="246520">
                   <a:extLst>
                     <a:ext uri="{9D8B030D-6E8A-4147-A177-3AD203B41FA5}">
                       <a16:colId xmlns:a16="http://schemas.microsoft.com/office/drawing/2014/main" val="2939128599"/>
@@ -7871,7 +7871,7 @@
                             <a:srgbClr val="FF0000"/>
                           </a:solidFill>
                         </a:rPr>
-                        <a:t>1</a:t>
+                        <a:t>0</a:t>
                       </a:r>
                     </a:p>
                   </a:txBody>
